--- a/docs/submission/claude-b-materials/M04-PRESENTATION-DRAFT.pptx
+++ b/docs/submission/claude-b-materials/M04-PRESENTATION-DRAFT.pptx
@@ -36,7 +36,7 @@
           <p:cNvPr id="3" name="Title">
             <a:extLst xmlns:a="http://schemas.openxmlformats.org/drawingml/2006/main">
               <a:ext uri="{FF2B5EF4-FFF2-40B4-BE49-F238E27FC236}">
-                <a16:creationId xmlns:a16="http://schemas.microsoft.com/office/drawing/2014/main" id="{41230F41-3194-4BBD-B4DD-0A6D68AB3558}"/>
+                <a16:creationId xmlns:a16="http://schemas.microsoft.com/office/drawing/2014/main" id="{53D15A25-2607-4DFC-8D42-932A485DF6EE}"/>
               </a:ext>
             </a:extLst>
           </p:cNvPr>
@@ -265,7 +265,7 @@
           <p:cNvPr id="2" name="Subtitle">
             <a:extLst xmlns:a="http://schemas.openxmlformats.org/drawingml/2006/main">
               <a:ext uri="{FF2B5EF4-FFF2-40B4-BE49-F238E27FC236}">
-                <a16:creationId xmlns:a16="http://schemas.microsoft.com/office/drawing/2014/main" id="{A8BE3F12-3A14-442B-963F-254F9CFCF723}"/>
+                <a16:creationId xmlns:a16="http://schemas.microsoft.com/office/drawing/2014/main" id="{DAC47256-17C4-4203-94BF-FBBE56F35A6B}"/>
               </a:ext>
             </a:extLst>
           </p:cNvPr>
@@ -511,7 +511,7 @@
           <p:cNvPr id="2" name="Section title">
             <a:extLst xmlns:a="http://schemas.openxmlformats.org/drawingml/2006/main">
               <a:ext uri="{FF2B5EF4-FFF2-40B4-BE49-F238E27FC236}">
-                <a16:creationId xmlns:a16="http://schemas.microsoft.com/office/drawing/2014/main" id="{2DC9F86A-F72D-46A2-924A-20954947610C}"/>
+                <a16:creationId xmlns:a16="http://schemas.microsoft.com/office/drawing/2014/main" id="{8E67836D-9549-49C6-856A-2DBB6898857B}"/>
               </a:ext>
             </a:extLst>
           </p:cNvPr>
@@ -757,7 +757,7 @@
           <p:cNvPr id="3" name="Title">
             <a:extLst xmlns:a="http://schemas.openxmlformats.org/drawingml/2006/main">
               <a:ext uri="{FF2B5EF4-FFF2-40B4-BE49-F238E27FC236}">
-                <a16:creationId xmlns:a16="http://schemas.microsoft.com/office/drawing/2014/main" id="{EC3B6722-EFB0-4AE7-B28E-11063488404E}"/>
+                <a16:creationId xmlns:a16="http://schemas.microsoft.com/office/drawing/2014/main" id="{8DDC8D8A-7835-4D29-B1BF-29956DEF120E}"/>
               </a:ext>
             </a:extLst>
           </p:cNvPr>
@@ -986,7 +986,7 @@
           <p:cNvPr id="2" name="Body">
             <a:extLst xmlns:a="http://schemas.openxmlformats.org/drawingml/2006/main">
               <a:ext uri="{FF2B5EF4-FFF2-40B4-BE49-F238E27FC236}">
-                <a16:creationId xmlns:a16="http://schemas.microsoft.com/office/drawing/2014/main" id="{C21B4995-C1FF-43E1-A61F-610841CC33E7}"/>
+                <a16:creationId xmlns:a16="http://schemas.microsoft.com/office/drawing/2014/main" id="{8E1A032F-4848-4113-A4D0-D1D8216E47FF}"/>
               </a:ext>
             </a:extLst>
           </p:cNvPr>
@@ -1232,7 +1232,7 @@
           <p:cNvPr id="4" name="Title">
             <a:extLst xmlns:a="http://schemas.openxmlformats.org/drawingml/2006/main">
               <a:ext uri="{FF2B5EF4-FFF2-40B4-BE49-F238E27FC236}">
-                <a16:creationId xmlns:a16="http://schemas.microsoft.com/office/drawing/2014/main" id="{22399D1F-9151-49A7-B849-ED120D8176BA}"/>
+                <a16:creationId xmlns:a16="http://schemas.microsoft.com/office/drawing/2014/main" id="{D2515D6D-4BCE-4CC9-8D2E-51908BABEB6A}"/>
               </a:ext>
             </a:extLst>
           </p:cNvPr>
@@ -1461,7 +1461,7 @@
           <p:cNvPr id="2" name="Left column">
             <a:extLst xmlns:a="http://schemas.openxmlformats.org/drawingml/2006/main">
               <a:ext uri="{FF2B5EF4-FFF2-40B4-BE49-F238E27FC236}">
-                <a16:creationId xmlns:a16="http://schemas.microsoft.com/office/drawing/2014/main" id="{D7F62AD5-D06E-40EC-9D87-3BFB0FC8503E}"/>
+                <a16:creationId xmlns:a16="http://schemas.microsoft.com/office/drawing/2014/main" id="{A2295370-8447-4F08-A46B-6C9EE8676AE2}"/>
               </a:ext>
             </a:extLst>
           </p:cNvPr>
@@ -1690,7 +1690,7 @@
           <p:cNvPr id="3" name="Right column">
             <a:extLst xmlns:a="http://schemas.openxmlformats.org/drawingml/2006/main">
               <a:ext uri="{FF2B5EF4-FFF2-40B4-BE49-F238E27FC236}">
-                <a16:creationId xmlns:a16="http://schemas.microsoft.com/office/drawing/2014/main" id="{600311D8-30ED-4088-923E-DBFEF0EFD76B}"/>
+                <a16:creationId xmlns:a16="http://schemas.microsoft.com/office/drawing/2014/main" id="{010FF4E3-E042-426F-A69D-E5C55D99DDFA}"/>
               </a:ext>
             </a:extLst>
           </p:cNvPr>
@@ -1936,7 +1936,7 @@
           <p:cNvPr id="3" name="Title">
             <a:extLst xmlns:a="http://schemas.openxmlformats.org/drawingml/2006/main">
               <a:ext uri="{FF2B5EF4-FFF2-40B4-BE49-F238E27FC236}">
-                <a16:creationId xmlns:a16="http://schemas.microsoft.com/office/drawing/2014/main" id="{4539C67D-69A8-4E73-B9F5-CC1C4C60E011}"/>
+                <a16:creationId xmlns:a16="http://schemas.microsoft.com/office/drawing/2014/main" id="{243E2DF9-06E5-49DA-8243-CEEB35FF8337}"/>
               </a:ext>
             </a:extLst>
           </p:cNvPr>
@@ -2165,7 +2165,7 @@
           <p:cNvPr id="2" name="Left column">
             <a:extLst xmlns:a="http://schemas.openxmlformats.org/drawingml/2006/main">
               <a:ext uri="{FF2B5EF4-FFF2-40B4-BE49-F238E27FC236}">
-                <a16:creationId xmlns:a16="http://schemas.microsoft.com/office/drawing/2014/main" id="{76CC0BA0-3F50-487B-BC18-A6AEF7818B1A}"/>
+                <a16:creationId xmlns:a16="http://schemas.microsoft.com/office/drawing/2014/main" id="{FEBD7877-EE2A-4BD9-877D-F25B7870A20B}"/>
               </a:ext>
             </a:extLst>
           </p:cNvPr>
@@ -2432,12 +2432,12 @@
   </p:cSld>
   <p:clrMap bg1="lt1" tx1="dk1" bg2="lt2" tx2="dk2" accent1="accent1" accent2="accent2" accent3="accent3" accent4="accent4" accent5="accent5" accent6="accent6" hlink="hlink" folHlink="folHlink"/>
   <p:sldLayoutIdLst>
-    <p:sldLayoutId xmlns:r="http://schemas.openxmlformats.org/officeDocument/2006/relationships" id="2147483649" r:id="R54913bb01e314fb1"/>
-    <p:sldLayoutId xmlns:r="http://schemas.openxmlformats.org/officeDocument/2006/relationships" id="2147483650" r:id="Rc8f5700f706e46a9"/>
-    <p:sldLayoutId xmlns:r="http://schemas.openxmlformats.org/officeDocument/2006/relationships" id="2147483651" r:id="Rd48cea20fb524a3b"/>
-    <p:sldLayoutId xmlns:r="http://schemas.openxmlformats.org/officeDocument/2006/relationships" id="2147483652" r:id="R594425a55b874570"/>
-    <p:sldLayoutId xmlns:r="http://schemas.openxmlformats.org/officeDocument/2006/relationships" id="2147483653" r:id="R4edee452376b4256"/>
-    <p:sldLayoutId xmlns:r="http://schemas.openxmlformats.org/officeDocument/2006/relationships" id="2147483654" r:id="R92423a102bab47cb"/>
+    <p:sldLayoutId xmlns:r="http://schemas.openxmlformats.org/officeDocument/2006/relationships" id="2147483649" r:id="R0c23e21051e34b81"/>
+    <p:sldLayoutId xmlns:r="http://schemas.openxmlformats.org/officeDocument/2006/relationships" id="2147483650" r:id="Re849ae78b0c841c4"/>
+    <p:sldLayoutId xmlns:r="http://schemas.openxmlformats.org/officeDocument/2006/relationships" id="2147483651" r:id="R763616f79b064515"/>
+    <p:sldLayoutId xmlns:r="http://schemas.openxmlformats.org/officeDocument/2006/relationships" id="2147483652" r:id="R88c233adb49f4eea"/>
+    <p:sldLayoutId xmlns:r="http://schemas.openxmlformats.org/officeDocument/2006/relationships" id="2147483653" r:id="R45777a8a5ccb45ba"/>
+    <p:sldLayoutId xmlns:r="http://schemas.openxmlformats.org/officeDocument/2006/relationships" id="2147483654" r:id="Rfb409fc3efb44ac5"/>
   </p:sldLayoutIdLst>
   <p:txStyles>
     <p:titleStyle>
@@ -3094,7 +3094,7 @@
                 <a:latin typeface="Microsoft YaHei"/>
                 <a:ea typeface="Microsoft YaHei"/>
               </a:rPr>
-              <a:t>材料基准：共同 main 36cdc449（材料稿；冻结候选确定后逐节复核）</a:t>
+              <a:t>材料基准：共同 main 319aa63（材料稿；冻结候选确定后逐节复核）</a:t>
             </a:r>
           </a:p>
           <a:p>
@@ -4316,7 +4316,24 @@
                 <a:latin typeface="Microsoft YaHei"/>
                 <a:ea typeface="Microsoft YaHei"/>
               </a:rPr>
-              <a:t>• SMTP/飞书：配置未就绪、未获发送许可、终端实收未完成 —— 服务接受不写成实收；输出字段固定 terminal_receipt_confirmed=False</a:t>
+              <a:t>• 飞书手机端：持有人在受控单一事件实测确认实收；SMTP：一次发送遇 SSL 意外 EOF，终端实收待核、未补发</a:t>
+            </a:r>
+          </a:p>
+          <a:p>
+            <a:pPr algn="l">
+              <a:spcAft>
+                <a:spcPts val="120"/>
+              </a:spcAft>
+            </a:pPr>
+            <a:r>
+              <a:rPr lang="zh-CN" sz="1300" dirty="0">
+                <a:solidFill>
+                  <a:srgbClr val="B45309"/>
+                </a:solidFill>
+                <a:latin typeface="Microsoft YaHei"/>
+                <a:ea typeface="Microsoft YaHei"/>
+              </a:rPr>
+              <a:t>• 服务接受不写成实收；输出字段固定 terminal_receipt_confirmed=False；完整双渠道 E1 未完成</a:t>
             </a:r>
           </a:p>
         </p:txBody>
@@ -4442,7 +4459,7 @@
                 <a:latin typeface="Microsoft YaHei"/>
                 <a:ea typeface="Microsoft YaHei"/>
               </a:rPr>
-              <a:t>• 真实 PG 18 / Python 3.14 本机隔离实例：告警套件 380 passed / 2 skipped（PG opt-in）/ 15 subtests</a:t>
+              <a:t>• 真实 PG 18 / Python 3.14 本机隔离实例（main 319aa63 + PR #96 5fa963c）：告警套件 400 passed / 2 skipped（PG opt-in）/ 15 subtests</a:t>
             </a:r>
           </a:p>
           <a:p>
@@ -4459,7 +4476,7 @@
                 <a:latin typeface="Microsoft YaHei"/>
                 <a:ea typeface="Microsoft YaHei"/>
               </a:rPr>
-              <a:t>• 更正契约 13 条回归（含双连接锁交错：更正排队于原异常行锁后不回退并发提交的 resolved）</a:t>
+              <a:t>• 更正契约 21 条回归（含双连接锁交错：更正排队于原异常行锁后不回退并发提交的 resolved），已随 main 319aa63 合入</a:t>
             </a:r>
           </a:p>
           <a:p>
@@ -4476,7 +4493,7 @@
                 <a:latin typeface="Microsoft YaHei"/>
                 <a:ea typeface="Microsoft YaHei"/>
               </a:rPr>
-              <a:t>• CI（PR #80 head b07a5e3）：6 workflows 全绿；mypy 0 错误；ruff 全绿</a:t>
+              <a:t>• CI（PR #80 组合头 d1f5359）：9 workflows 全绿；mypy 0 错误；ruff 全绿</a:t>
             </a:r>
           </a:p>
           <a:p>
@@ -4527,7 +4544,24 @@
                 <a:latin typeface="Microsoft YaHei"/>
                 <a:ea typeface="Microsoft YaHei"/>
               </a:rPr>
-              <a:t>• C：受控远端测试库 1125 passed / 12 skipped（Backend run 39900905629）；严格联合 1137 passed（run 39900905633）</a:t>
+              <a:t>• C 第二机（PR #11 精确 0db9402）：默认 CMD/HTTP 与 14 设备分段通过；GuardedRecovery 降温检查两次失败、未最终签收（并列如实）</a:t>
+            </a:r>
+          </a:p>
+          <a:p>
+            <a:pPr algn="l">
+              <a:spcAft>
+                <a:spcPts val="120"/>
+              </a:spcAft>
+            </a:pPr>
+            <a:r>
+              <a:rPr lang="zh-CN" sz="1350" dirty="0">
+                <a:solidFill>
+                  <a:srgbClr val="334155"/>
+                </a:solidFill>
+                <a:latin typeface="Microsoft YaHei"/>
+                <a:ea typeface="Microsoft YaHei"/>
+              </a:rPr>
+              <a:t>• A 通知实测：飞书手机端实收由 A 本人确认；SMTP 一次 SSL 意外 EOF、实收待核、未补发（#8 6440797666）</a:t>
             </a:r>
           </a:p>
           <a:p>
@@ -4561,7 +4595,7 @@
                 <a:latin typeface="Microsoft YaHei"/>
                 <a:ea typeface="Microsoft YaHei"/>
               </a:rPr>
-              <a:t>• 以上为隔离回归与受控分段，不是业务现场验收次数；完整同版 E1、第二机、双渠道终端实收未完成</a:t>
+              <a:t>• 以上为隔离回归与受控分段，不是业务现场验收次数；完整同版 E1、最终第二机、SMTP 实收未完成</a:t>
             </a:r>
           </a:p>
         </p:txBody>
@@ -4687,7 +4721,7 @@
                 <a:latin typeface="Microsoft YaHei"/>
                 <a:ea typeface="Microsoft YaHei"/>
               </a:rPr>
-              <a:t>• 通知终端实收待持有人配置并经具体授权后实测；C 自动恢复发送门禁收尾中</a:t>
+              <a:t>• 飞书手机实收已确认（A 本人）；SMTP 实收待核未补发；C GuardedRecovery 两次降温检查失败、未最终签收</a:t>
             </a:r>
           </a:p>
           <a:p>

--- a/docs/submission/claude-b-materials/M04-PRESENTATION-DRAFT.pptx
+++ b/docs/submission/claude-b-materials/M04-PRESENTATION-DRAFT.pptx
@@ -3094,7 +3094,7 @@
                 <a:latin typeface="Microsoft YaHei"/>
                 <a:ea typeface="Microsoft YaHei"/>
               </a:rPr>
-              <a:t>材料基准：共同 main 319aa63（材料稿；冻结候选确定后逐节复核）</a:t>
+              <a:t>材料基准：共同 main 319aa63（= 一库 E1 实测来源 e7fffd61，全 Git 树一致）</a:t>
             </a:r>
           </a:p>
           <a:p>
@@ -3483,7 +3483,7 @@
         <p:spPr>
           <a:xfrm>
             <a:off x="548640" y="1234440"/>
-            <a:ext cx="6722406" cy="5029200"/>
+            <a:ext cx="6720534" cy="5029200"/>
           </a:xfrm>
           <a:prstGeom prst="rect">
             <a:avLst/>
@@ -3498,8 +3498,8 @@
         </p:nvSpPr>
         <p:spPr>
           <a:xfrm>
-            <a:off x="7545366" y="1463040"/>
-            <a:ext cx="4280874" cy="4572000"/>
+            <a:off x="7543494" y="1463040"/>
+            <a:ext cx="4282746" cy="4572000"/>
           </a:xfrm>
           <a:prstGeom prst="rect">
             <a:avLst/>
@@ -4316,7 +4316,7 @@
                 <a:latin typeface="Microsoft YaHei"/>
                 <a:ea typeface="Microsoft YaHei"/>
               </a:rPr>
-              <a:t>• 飞书手机端：持有人在受控单一事件实测确认实收；SMTP：一次发送遇 SSL 意外 EOF，终端实收待核、未补发</a:t>
+              <a:t>• 一库同版同事件 E1（#6 6459911129）：SMTP 与飞书各一次、两服务接受，队长本人确认邮件与手机飞书均收到、来源 ID 一致（d89c0bf9）</a:t>
             </a:r>
           </a:p>
           <a:p>
@@ -4333,7 +4333,7 @@
                 <a:latin typeface="Microsoft YaHei"/>
                 <a:ea typeface="Microsoft YaHei"/>
               </a:rPr>
-              <a:t>• 服务接受不写成实收；输出字段固定 terminal_receipt_confirmed=False；完整双渠道 E1 未完成</a:t>
+              <a:t>• 服务接受 ≠ 终端实收仍分记；旧 10-27 SSL EOF 为历史未补发；本段演示环境 dry-run，不展示发送画面</a:t>
             </a:r>
           </a:p>
         </p:txBody>
@@ -4459,7 +4459,7 @@
                 <a:latin typeface="Microsoft YaHei"/>
                 <a:ea typeface="Microsoft YaHei"/>
               </a:rPr>
-              <a:t>• 真实 PG 18 / Python 3.14 本机隔离实例（main 319aa63 + PR #96 5fa963c）：告警套件 400 passed / 2 skipped（PG opt-in）/ 15 subtests</a:t>
+              <a:t>• 真实 PG 18 / Python 3.14 本机隔离实例（main 319aa63，= 一库 E1 实测来源 e7fffd61，全树一致）：告警与更正契约 21 条回归已随 main 合入</a:t>
             </a:r>
           </a:p>
           <a:p>
@@ -4476,7 +4476,7 @@
                 <a:latin typeface="Microsoft YaHei"/>
                 <a:ea typeface="Microsoft YaHei"/>
               </a:rPr>
-              <a:t>• 更正契约 21 条回归（含双连接锁交错：更正排队于原异常行锁后不回退并发提交的 resolved），已随 main 319aa63 合入</a:t>
+              <a:t>• PR #96 SMTP 阶段诊断为待审增量（候选历史，不并入冻结主线成绩）：告警套件 410 passed / 2 skipped / 15 subtests</a:t>
             </a:r>
           </a:p>
           <a:p>
@@ -4527,7 +4527,7 @@
                 <a:latin typeface="Microsoft YaHei"/>
                 <a:ea typeface="Microsoft YaHei"/>
               </a:rPr>
-              <a:t>• A45 精确 4792ac3：后端 1216 testcase / 0 失败错误跳过 / 92%；A46 精确 62bb2ef：14 设备组合链见第 4 页</a:t>
+              <a:t>• 一库同版同事件 E1（#6 6459911129）：双渠道终端实收由队长本人确认；浏览器 281 行 14 列 CSV 与 15 页 ID 一致；普通用户 POST 403</a:t>
             </a:r>
           </a:p>
           <a:p>
@@ -4544,7 +4544,7 @@
                 <a:latin typeface="Microsoft YaHei"/>
                 <a:ea typeface="Microsoft YaHei"/>
               </a:rPr>
-              <a:t>• C 第二机（PR #11 精确 0db9402）：默认 CMD/HTTP 与 14 设备分段通过；GuardedRecovery 降温检查两次失败、未最终签收（并列如实）</a:t>
+              <a:t>• C 第二机（干净检出 e7fffd61）：默认 CMD 无源码挂载 HTTP 通过、14 设备夹具；HTTP CSV 10 行 14 列；API 文件 ≠ 浏览器下载（如实）</a:t>
             </a:r>
           </a:p>
           <a:p>
@@ -4561,7 +4561,7 @@
                 <a:latin typeface="Microsoft YaHei"/>
                 <a:ea typeface="Microsoft YaHei"/>
               </a:rPr>
-              <a:t>• A 通知实测：飞书手机端实收由 A 本人确认；SMTP 一次 SSL 意外 EOF、实收待核、未补发（#8 6440797666）</a:t>
+              <a:t>• A 离线入口（PR #95 cdb7d95）：14 在线设备、CSV 15 行全 ID、无网络 PG 重启回读 1202 条</a:t>
             </a:r>
           </a:p>
           <a:p>
@@ -4595,7 +4595,7 @@
                 <a:latin typeface="Microsoft YaHei"/>
                 <a:ea typeface="Microsoft YaHei"/>
               </a:rPr>
-              <a:t>• 以上为隔离回归与受控分段，不是业务现场验收次数；完整同版 E1、最终第二机、SMTP 实收未完成</a:t>
+              <a:t>• 以上为隔离回归与受控分段，不是业务现场验收次数；第二机 180s sustained、浏览器下载核验、最终第二机/M01—M05 总签收未完成；旧 0db9402 失败与旧 10-27 SSL EOF 为有日期历史</a:t>
             </a:r>
           </a:p>
         </p:txBody>
@@ -4721,7 +4721,7 @@
                 <a:latin typeface="Microsoft YaHei"/>
                 <a:ea typeface="Microsoft YaHei"/>
               </a:rPr>
-              <a:t>• 飞书手机实收已确认（A 本人）；SMTP 实收待核未补发；C GuardedRecovery 两次降温检查失败、未最终签收</a:t>
+              <a:t>• 双渠道终端实收已由队长本人在一库同版 E1 确认（#6 6459911129）；E1 出口 ≠ 最终第二机总签收/投稿</a:t>
             </a:r>
           </a:p>
           <a:p>
@@ -4755,7 +4755,7 @@
                 <a:latin typeface="Microsoft YaHei"/>
                 <a:ea typeface="Microsoft YaHei"/>
               </a:rPr>
-              <a:t>• WH1 多批告警评价 hold；模拟数据不宣称真实品质实验；冻结候选后逐节复核</a:t>
+              <a:t>• WH1 多批告警评价 hold；第二机自然持续恢复与浏览器下载核验未测；模拟数据不宣称真实品质实验</a:t>
             </a:r>
           </a:p>
           <a:p>

--- a/docs/submission/claude-b-materials/M04-PRESENTATION-DRAFT.pptx
+++ b/docs/submission/claude-b-materials/M04-PRESENTATION-DRAFT.pptx
@@ -4476,7 +4476,7 @@
                 <a:latin typeface="Microsoft YaHei"/>
                 <a:ea typeface="Microsoft YaHei"/>
               </a:rPr>
-              <a:t>• PR #96 SMTP 阶段诊断为待审增量（候选历史，不并入冻结主线成绩）：告警套件 410 passed / 2 skipped / 15 subtests</a:t>
+              <a:t>• PR #96 SMTP 派发修复为待审增量（候选，不并入冻结主线成绩）：告警套件 419 passed / 2 skipped / 17 subtests（合成 provider，零真实外发）</a:t>
             </a:r>
           </a:p>
           <a:p>
@@ -4544,7 +4544,7 @@
                 <a:latin typeface="Microsoft YaHei"/>
                 <a:ea typeface="Microsoft YaHei"/>
               </a:rPr>
-              <a:t>• C 第二机（干净检出 e7fffd61）：默认 CMD 无源码挂载 HTTP 通过、14 设备夹具；HTTP CSV 10 行 14 列；API 文件 ≠ 浏览器下载（如实）</a:t>
+              <a:t>• C 第二机（干净检出 e7fffd61）：默认 CMD 无源码挂载 HTTP 通过、14 设备夹具；HTTP CSV 10 行 14 列；API 文件 ≠ 浏览器下载（如实，该段历史）</a:t>
             </a:r>
           </a:p>
           <a:p>
@@ -4561,6 +4561,23 @@
                 <a:latin typeface="Microsoft YaHei"/>
                 <a:ea typeface="Microsoft YaHei"/>
               </a:rPr>
+              <a:t>• C 第二机浏览器实测（10-29 交互入口包 03b6002/e7 镜像）：浏览器实际下载 257 行 14 列 CSV 与 13 页快照逐行一致；14 在线、一次 executed ACK、匿名 401</a:t>
+            </a:r>
+          </a:p>
+          <a:p>
+            <a:pPr algn="l">
+              <a:spcAft>
+                <a:spcPts val="120"/>
+              </a:spcAft>
+            </a:pPr>
+            <a:r>
+              <a:rPr lang="zh-CN" sz="1350" dirty="0">
+                <a:solidFill>
+                  <a:srgbClr val="334155"/>
+                </a:solidFill>
+                <a:latin typeface="Microsoft YaHei"/>
+                <a:ea typeface="Microsoft YaHei"/>
+              </a:rPr>
               <a:t>• A 离线入口（PR #95 cdb7d95）：14 在线设备、CSV 15 行全 ID、无网络 PG 重启回读 1202 条</a:t>
             </a:r>
           </a:p>
@@ -4595,7 +4612,7 @@
                 <a:latin typeface="Microsoft YaHei"/>
                 <a:ea typeface="Microsoft YaHei"/>
               </a:rPr>
-              <a:t>• 以上为隔离回归与受控分段，不是业务现场验收次数；第二机 180s sustained、浏览器下载核验、最终第二机/M01—M05 总签收未完成；旧 0db9402 失败与旧 10-27 SSL EOF 为有日期历史</a:t>
+              <a:t>• 以上为隔离回归与受控分段，不是业务现场验收次数；第二机 180s sustained、交互包普通用户 403、最终第二机/M01—M05 总签收未完成；旧 0db9402 失败与旧 10-27 SSL EOF 为有日期历史</a:t>
             </a:r>
           </a:p>
         </p:txBody>
@@ -4755,7 +4772,7 @@
                 <a:latin typeface="Microsoft YaHei"/>
                 <a:ea typeface="Microsoft YaHei"/>
               </a:rPr>
-              <a:t>• WH1 多批告警评价 hold；第二机自然持续恢复与浏览器下载核验未测；模拟数据不宣称真实品质实验</a:t>
+              <a:t>• WH1 多批告警评价 hold；第二机自然持续恢复未测（浏览器下载核验已由 10-29 交互入口包完成，见 S7）；模拟数据不宣称真实品质实验</a:t>
             </a:r>
           </a:p>
           <a:p>
